--- a/PowerPoints/05 - Lexical Analysis.pptx
+++ b/PowerPoints/05 - Lexical Analysis.pptx
@@ -9557,7 +9557,13 @@
           <a:p>
             <a:r>
               <a:rPr lang="en-US" dirty="0"/>
-              <a:t>Primary class for lexical analysis: Scanner</a:t>
+              <a:t>Primary class for lexical analysis: </a:t>
+            </a:r>
+            <a:r>
+              <a:rPr lang="en-US" dirty="0">
+                <a:latin typeface="Consolas" panose="020B0609020204030204" pitchFamily="49" charset="0"/>
+              </a:rPr>
+              <a:t>Scanner</a:t>
             </a:r>
           </a:p>
           <a:p>
@@ -17729,59 +17735,37 @@
               <a:rPr lang="en-US" sz="1800" dirty="0">
                 <a:latin typeface="Consolas" panose="020B0609020204030204" pitchFamily="49" charset="0"/>
               </a:rPr>
-              <a:t>assert Character.isDigit((char) </a:t>
+              <a:t>assert </a:t>
+            </a:r>
+            <a:r>
+              <a:rPr lang="en-US" sz="1800">
+                <a:latin typeface="Consolas" panose="020B0609020204030204" pitchFamily="49" charset="0"/>
+              </a:rPr>
+              <a:t>CharUtil.</a:t>
             </a:r>
             <a:r>
               <a:rPr lang="en-US" sz="1800" dirty="0" err="1">
                 <a:latin typeface="Consolas" panose="020B0609020204030204" pitchFamily="49" charset="0"/>
               </a:rPr>
+              <a:t>isDigit</a:t>
+            </a:r>
+            <a:r>
+              <a:rPr lang="en-US" sz="1800" dirty="0">
+                <a:latin typeface="Consolas" panose="020B0609020204030204" pitchFamily="49" charset="0"/>
+              </a:rPr>
+              <a:t>(</a:t>
+            </a:r>
+            <a:r>
+              <a:rPr lang="en-US" sz="1800" dirty="0" err="1">
+                <a:latin typeface="Consolas" panose="020B0609020204030204" pitchFamily="49" charset="0"/>
+              </a:rPr>
               <a:t>source.currentChar</a:t>
             </a:r>
             <a:r>
               <a:rPr lang="en-US" sz="1800" dirty="0">
                 <a:latin typeface="Consolas" panose="020B0609020204030204" pitchFamily="49" charset="0"/>
               </a:rPr>
-              <a:t>()) :</a:t>
-            </a:r>
-          </a:p>
-          <a:p>
-            <a:pPr marL="457200" lvl="1" indent="0">
-              <a:spcBef>
-                <a:spcPts val="0"/>
-              </a:spcBef>
-              <a:buNone/>
-            </a:pPr>
-            <a:r>
-              <a:rPr lang="en-US" sz="1800" dirty="0">
-                <a:latin typeface="Consolas" panose="020B0609020204030204" pitchFamily="49" charset="0"/>
-              </a:rPr>
-              <a:t>    "Check integer literal start for digit at position "</a:t>
-            </a:r>
-          </a:p>
-          <a:p>
-            <a:pPr marL="457200" lvl="1" indent="0">
-              <a:spcBef>
-                <a:spcPts val="0"/>
-              </a:spcBef>
-              <a:buNone/>
-            </a:pPr>
-            <a:r>
-              <a:rPr lang="en-US" sz="1800" dirty="0">
-                <a:latin typeface="Consolas" panose="020B0609020204030204" pitchFamily="49" charset="0"/>
-              </a:rPr>
-              <a:t>    + </a:t>
-            </a:r>
-            <a:r>
-              <a:rPr lang="en-US" sz="1800" dirty="0" err="1">
-                <a:latin typeface="Consolas" panose="020B0609020204030204" pitchFamily="49" charset="0"/>
-              </a:rPr>
-              <a:t>source.charPosition</a:t>
-            </a:r>
-            <a:r>
-              <a:rPr lang="en-US" sz="1800" dirty="0">
-                <a:latin typeface="Consolas" panose="020B0609020204030204" pitchFamily="49" charset="0"/>
-              </a:rPr>
-              <a:t>() + ".";</a:t>
+              <a:t>());</a:t>
             </a:r>
           </a:p>
           <a:p>
@@ -21257,18 +21241,23 @@
             </a:r>
             <a:r>
               <a:rPr lang="en-US" dirty="0"/>
-              <a:t>”, “</a:t>
-            </a:r>
-            <a:r>
-              <a:rPr lang="en-US" dirty="0">
+              <a:t>”, </a:t>
+            </a:r>
+            <a:r>
+              <a:rPr lang="en-US"/>
+              <a:t>“</a:t>
+            </a:r>
+            <a:r>
+              <a:rPr lang="en-US">
                 <a:latin typeface="Consolas" panose="020B0609020204030204" pitchFamily="49" charset="0"/>
               </a:rPr>
               <a:t>;</a:t>
             </a:r>
             <a:r>
-              <a:rPr lang="en-US" dirty="0"/>
-              <a:t>”, …), </a:t>
-            </a:r>
+              <a:rPr lang="en-US"/>
+              <a:t>”, …)</a:t>
+            </a:r>
+            <a:endParaRPr lang="en-US" dirty="0"/>
           </a:p>
           <a:p>
             <a:pPr lvl="1"/>
